--- a/docs/基本情報タブ_操作マニュアル.pptx
+++ b/docs/基本情報タブ_操作マニュアル.pptx
@@ -4739,7 +4739,7 @@
                 </a:solidFill>
                 <a:latin typeface="Meiryo UI"/>
               </a:rPr>
-              <a:t>A. 「編集」中のままかも。右上の「保存する」を押したか確認を。編集中は自動保存もされます。</a:t>
+              <a:t>A. 自動保存はありません。「編集」中に右上の「保存する」を押したか確認してください。うっかり保存せず移動しようとしても確認ダイアログが出るので大丈夫です。</a:t>
             </a:r>
           </a:p>
         </p:txBody>
@@ -6401,7 +6401,7 @@
             <a:avLst/>
           </a:prstGeom>
           <a:solidFill>
-            <a:srgbClr val="E2F0EC"/>
+            <a:srgbClr val="FBEAE2"/>
           </a:solidFill>
           <a:ln>
             <a:noFill/>
@@ -6445,7 +6445,7 @@
             <a:avLst/>
           </a:prstGeom>
           <a:solidFill>
-            <a:srgbClr val="0E8A78"/>
+            <a:srgbClr val="E2714A"/>
           </a:solidFill>
           <a:ln>
             <a:noFill/>
@@ -6507,11 +6507,11 @@
             <a:r>
               <a:rPr sz="1300" b="1">
                 <a:solidFill>
-                  <a:srgbClr val="0E8A78"/>
+                  <a:srgbClr val="E2714A"/>
                 </a:solidFill>
                 <a:latin typeface="Meiryo UI"/>
               </a:rPr>
-              <a:t>💾 入力中は自動保存もされます</a:t>
+              <a:t>⚠️ 自動保存はありません（2026-08〜）</a:t>
             </a:r>
           </a:p>
           <a:p>
@@ -6530,7 +6530,7 @@
                 </a:solidFill>
                 <a:latin typeface="Meiryo UI"/>
               </a:rPr>
-              <a:t>欄を変えると約1〜2秒後に「自動保存しました」と表示。最後に「保存する」を押すと確実です。保存内容は毎日の自動更新のあとも残ります。</a:t>
+              <a:t>編集したら必ず右上の「保存する」を押してください。未保存の間はヘッダーに「未保存の変更があります」と表示され、保存せず他の利用者に移動・タブを閉じようとすると確認が出ます。保存内容は毎日の自動更新のあとも残ります。</a:t>
             </a:r>
           </a:p>
         </p:txBody>
